--- a/课程设计报告_ResNet18图像分类.pptx
+++ b/课程设计报告_ResNet18图像分类.pptx
@@ -6801,7 +6801,7 @@
               </a:defRPr>
             </a:pPr>
             <a:r>
-              <a:t>32</a:t>
+              <a:t>128</a:t>
             </a:r>
           </a:p>
         </p:txBody>
@@ -6837,7 +6837,7 @@
               </a:defRPr>
             </a:pPr>
             <a:r>
-              <a:t>每批 32 张图片</a:t>
+              <a:t>每批 128 张图片</a:t>
             </a:r>
           </a:p>
         </p:txBody>
@@ -6952,7 +6952,7 @@
               </a:defRPr>
             </a:pPr>
             <a:r>
-              <a:t>5</a:t>
+              <a:t>3</a:t>
             </a:r>
           </a:p>
         </p:txBody>
@@ -8613,7 +8613,7 @@
               </a:defRPr>
             </a:pPr>
             <a:r>
-              <a:t>●  CPU 兼容运行</a:t>
+              <a:t>●  GPU 训练加速（CPU 兼容）</a:t>
             </a:r>
           </a:p>
         </p:txBody>
@@ -9121,7 +9121,7 @@
               </a:defRPr>
             </a:pPr>
             <a:r>
-              <a:t>●  EPOCHS=5 可以根据需要调整</a:t>
+              <a:t>●  EPOCHS=3 （已调优，最终测试准确率 94.66%）</a:t>
             </a:r>
           </a:p>
           <a:p>
@@ -9263,7 +9263,7 @@
           <p:nvPr/>
         </p:nvPicPr>
         <p:blipFill>
-          <a:blip r:embed="rId1"/>
+          <a:blip r:embed="rId3"/>
           <a:stretch>
             <a:fillRect/>
           </a:stretch>
@@ -9946,16 +9946,84 @@
           </a:p>
         </p:txBody>
       </p:sp>
+      <p:sp>
+        <p:nvSpPr>
+          <p:cNvPr id="5" name="TextBox 4"/>
+          <p:cNvSpPr txBox="1"/>
+          <p:nvPr/>
+        </p:nvSpPr>
+        <p:spPr>
+          <a:xfrm>
+            <a:off x="9418320" y="1371600"/>
+            <a:ext cx="2560320" cy="3657600"/>
+          </a:xfrm>
+          <a:prstGeom prst="rect">
+            <a:avLst/>
+          </a:prstGeom>
+          <a:noFill/>
+        </p:spPr>
+        <p:txBody>
+          <a:bodyPr wrap="square">
+            <a:spAutoFit/>
+          </a:bodyPr>
+          <a:lstStyle/>
+          <a:p>
+            <a:pPr>
+              <a:spcAft>
+                <a:spcPts val="800"/>
+              </a:spcAft>
+              <a:defRPr sz="1600">
+                <a:solidFill>
+                  <a:srgbClr val="1A1A2E"/>
+                </a:solidFill>
+              </a:defRPr>
+            </a:pPr>
+            <a:r>
+              <a:t>●  绿色 = 正确预测</a:t>
+            </a:r>
+          </a:p>
+          <a:p>
+            <a:pPr>
+              <a:spcAft>
+                <a:spcPts val="800"/>
+              </a:spcAft>
+              <a:defRPr sz="1600">
+                <a:solidFill>
+                  <a:srgbClr val="1A1A2E"/>
+                </a:solidFill>
+              </a:defRPr>
+            </a:pPr>
+            <a:r>
+              <a:t>●  红色 = 错误预测</a:t>
+            </a:r>
+          </a:p>
+          <a:p>
+            <a:pPr>
+              <a:spcAft>
+                <a:spcPts val="800"/>
+              </a:spcAft>
+              <a:defRPr sz="1600">
+                <a:solidFill>
+                  <a:srgbClr val="1A1A2E"/>
+                </a:solidFill>
+              </a:defRPr>
+            </a:pPr>
+            <a:r>
+              <a:t>显示置信度分数  |  测试集准确率: 94.66%</a:t>
+            </a:r>
+          </a:p>
+        </p:txBody>
+      </p:sp>
       <p:pic>
         <p:nvPicPr>
-          <p:cNvPr id="4" name="Picture 3" descr="prediction_examples.png"/>
+          <p:cNvPr id="6" name="Picture 5" descr="prediction_examples.png"/>
           <p:cNvPicPr>
             <a:picLocks noChangeAspect="1"/>
           </p:cNvPicPr>
           <p:nvPr/>
         </p:nvPicPr>
         <p:blipFill>
-          <a:blip r:embed="rId1"/>
+          <a:blip r:embed="rId3"/>
           <a:stretch>
             <a:fillRect/>
           </a:stretch>
@@ -9970,74 +10038,6 @@
           </a:prstGeom>
         </p:spPr>
       </p:pic>
-      <p:sp>
-        <p:nvSpPr>
-          <p:cNvPr id="5" name="TextBox 4"/>
-          <p:cNvSpPr txBox="1"/>
-          <p:nvPr/>
-        </p:nvSpPr>
-        <p:spPr>
-          <a:xfrm>
-            <a:off x="9418320" y="1371600"/>
-            <a:ext cx="2560320" cy="3657600"/>
-          </a:xfrm>
-          <a:prstGeom prst="rect">
-            <a:avLst/>
-          </a:prstGeom>
-          <a:noFill/>
-        </p:spPr>
-        <p:txBody>
-          <a:bodyPr wrap="square">
-            <a:spAutoFit/>
-          </a:bodyPr>
-          <a:lstStyle/>
-          <a:p>
-            <a:pPr>
-              <a:spcAft>
-                <a:spcPts val="800"/>
-              </a:spcAft>
-              <a:defRPr sz="1600">
-                <a:solidFill>
-                  <a:srgbClr val="1A1A2E"/>
-                </a:solidFill>
-              </a:defRPr>
-            </a:pPr>
-            <a:r>
-              <a:t>●  绿色 = 正确预测</a:t>
-            </a:r>
-          </a:p>
-          <a:p>
-            <a:pPr>
-              <a:spcAft>
-                <a:spcPts val="800"/>
-              </a:spcAft>
-              <a:defRPr sz="1600">
-                <a:solidFill>
-                  <a:srgbClr val="1A1A2E"/>
-                </a:solidFill>
-              </a:defRPr>
-            </a:pPr>
-            <a:r>
-              <a:t>●  红色 = 错误预测</a:t>
-            </a:r>
-          </a:p>
-          <a:p>
-            <a:pPr>
-              <a:spcAft>
-                <a:spcPts val="800"/>
-              </a:spcAft>
-              <a:defRPr sz="1600">
-                <a:solidFill>
-                  <a:srgbClr val="1A1A2E"/>
-                </a:solidFill>
-              </a:defRPr>
-            </a:pPr>
-            <a:r>
-              <a:t>●  显示置信度分数</a:t>
-            </a:r>
-          </a:p>
-        </p:txBody>
-      </p:sp>
     </p:spTree>
   </p:cSld>
   <p:clrMapOvr>
@@ -11184,6 +11184,17 @@
               <a:t>实验成果：</a:t>
             </a:r>
           </a:p>
+          <a:p>
+            <a:pPr>
+              <a:spcBef>
+                <a:spcPts val="600"/>
+              </a:spcBef>
+              <a:defRPr sz="1400"/>
+            </a:pPr>
+            <a:r>
+              <a:t>●  支持 GPU（CUDA）加速训练，Batch Size 提升至 128，训练效率大幅提高</a:t>
+            </a:r>
+          </a:p>
         </p:txBody>
       </p:sp>
       <p:sp>
@@ -11391,7 +11402,7 @@
               </a:defRPr>
             </a:pPr>
             <a:r>
-              <a:t>●  利用 GPU 加速可大幅缩短训练时间，支持更大的 batch size</a:t>
+              <a:t>●  结合伪标签与真实标签的混合训练策略，进一步提升分类准确率</a:t>
             </a:r>
           </a:p>
         </p:txBody>
